--- a/wellness-business-plan/slides/ウェルネス事業_会社計画案_小林さん検討用.pptx
+++ b/wellness-business-plan/slides/ウェルネス事業_会社計画案_小林さん検討用.pptx
@@ -3655,7 +3655,7 @@
                         </a:rPr>
                         <a:t>・6ヶ月（2027年1月）で有償契約ゼロ、累計売上100万円未満
 ・セミナーの有償化がゼロ（全て無料勢に流れている）
-・保険再登録が半年経っても進んでいない</a:t>
+・体験→有償契約への転換が1件も生まれていない</a:t>
                       </a:r>
                     </a:p>
                   </a:txBody>
@@ -4279,7 +4279,7 @@
                           </a:solidFill>
                           <a:latin typeface="Yu Gothic"/>
                         </a:rPr>
-                        <a:t>募集人登録は退職で失効。再登録完了まで扱えないので、初年度の保険収益はゼロで組む方が誠実で強い</a:t>
+                        <a:t>保険募集は行わない（本人確認済み）。収益はFP相談と提携代理店への紹介までとし、計画から保険収益を外す。「保険を売らない」は中立の証明として営業の武器にする</a:t>
                       </a:r>
                     </a:p>
                   </a:txBody>
@@ -5092,7 +5092,7 @@
                 </a:solidFill>
                 <a:latin typeface="Yu Gothic"/>
               </a:rPr>
-              <a:t>①90日は事例づくり優先　②保険再登録を最優先　③月次で6つの数字を共有（うまくいかない月ほど早く）　④継続率90%を大事に　⑤できない約束はしない</a:t>
+              <a:t>①90日は事例づくり優先　②保険は「募集しない」一線を守る（FP相談・提携紹介まで）　③月次で6つの数字を共有（うまくいかない月ほど早く）　④継続率90%を大事に　⑤できない約束はしない</a:t>
             </a:r>
           </a:p>
         </p:txBody>
@@ -8083,7 +8083,7 @@
                 </a:solidFill>
                 <a:latin typeface="Yu Gothic"/>
               </a:rPr>
-              <a:t>保険募集人の再登録が未完了</a:t>
+              <a:t>保険募集は不可＝保険収益は計画に入れない（FP相談・提携紹介まで）</a:t>
             </a:r>
           </a:p>
           <a:p>
@@ -8459,7 +8459,7 @@
                 </a:solidFill>
                 <a:latin typeface="Yu Gothic"/>
               </a:rPr>
-              <a:t>S×O＝実感の有償化（体験×測定×施工）／ W×T＝入口は無料勢に譲り、保険は従、まず自社実証でWを潰す</a:t>
+              <a:t>S×O＝実感の有償化（体験×測定×施工）／ W×T＝入口は無料勢に譲り、保険は売らない（中立の証明に転換）</a:t>
             </a:r>
           </a:p>
         </p:txBody>
@@ -9112,7 +9112,7 @@
                 </a:solidFill>
                 <a:latin typeface="Yu Gothic"/>
               </a:rPr>
-              <a:t>①無料勢と価格で戦わない（入口は譲る）　②自社で実証してから売る　③保険は再登録完了まで扱わず、完了後も従</a:t>
+              <a:t>①無料勢と価格で戦わない（入口は譲る）　②自社で実証してから売る　③保険商品は売らない。FPとしての相談と提携代理店への紹介まで（「保険を売らない相談役」＝中立の証明）</a:t>
             </a:r>
           </a:p>
         </p:txBody>
